--- a/classes/parte-11-devsecops-y-seguridad-del-sdlc/246-supply-chain-security-sbom-y-slsa/clase-246-presentacion.pptx
+++ b/classes/parte-11-devsecops-y-seguridad-del-sdlc/246-supply-chain-security-sbom-y-slsa/clase-246-presentacion.pptx
@@ -17,6 +17,10 @@
     <p:sldId id="265" r:id="rId16"/>
     <p:sldId id="266" r:id="rId17"/>
     <p:sldId id="267" r:id="rId18"/>
+    <p:sldId id="268" r:id="rId19"/>
+    <p:sldId id="269" r:id="rId20"/>
+    <p:sldId id="270" r:id="rId21"/>
+    <p:sldId id="271" r:id="rId22"/>
   </p:sldIdLst>
   <p:sldSz cx="9144000" cy="6858000" type="screen4x3"/>
   <p:notesSz cx="6858000" cy="9144000"/>
@@ -3198,7 +3202,7 @@
                   <a:srgbClr val="0B3D2E"/>
                 </a:solidFill>
               </a:rPr>
-              <a:t>⚠️ Errores comunes</a:t>
+              <a:t>🧪 Laboratorio guiado</a:t>
             </a:r>
           </a:p>
         </p:txBody>
@@ -3236,67 +3240,97 @@
                   <a:srgbClr val="22282E"/>
                 </a:solidFill>
               </a:rPr>
-              <a:t>•  El SBOM no lista dependencias transitivas — Se generó de manifests, no del artefacto construido. Genera el SBOM de la imagen/binario final.</a:t>
-            </a:r>
-          </a:p>
-          <a:p>
-            <a:pPr>
-              <a:spcAft>
-                <a:spcPts val="600"/>
-              </a:spcAft>
-            </a:pPr>
-            <a:r>
-              <a:rPr sz="1500">
-                <a:solidFill>
-                  <a:srgbClr val="22282E"/>
-                </a:solidFill>
-              </a:rPr>
-              <a:t>•  "Tengo SBOM pero no me sirve" — No lo consumes. Intégralo con Grype/Trivy y en el proceso de respuesta a CVE.</a:t>
-            </a:r>
-          </a:p>
-          <a:p>
-            <a:pPr>
-              <a:spcAft>
-                <a:spcPts val="600"/>
-              </a:spcAft>
-            </a:pPr>
-            <a:r>
-              <a:rPr sz="1500">
-                <a:solidFill>
-                  <a:srgbClr val="22282E"/>
-                </a:solidFill>
-              </a:rPr>
-              <a:t>•  cosign verify-attestation falla — Tipo o identidad incorrectos. Ajusta --type y los filtros de certificado.</a:t>
-            </a:r>
-          </a:p>
-          <a:p>
-            <a:pPr>
-              <a:spcAft>
-                <a:spcPts val="600"/>
-              </a:spcAft>
-            </a:pPr>
-            <a:r>
-              <a:rPr sz="1500">
-                <a:solidFill>
-                  <a:srgbClr val="22282E"/>
-                </a:solidFill>
-              </a:rPr>
-              <a:t>•  Provenance dice que lo construyó una máquina desconocida — Build no aislado o token comprometido. Endurece el pipeline (clase 242) y usa runners efímeros.</a:t>
-            </a:r>
-          </a:p>
-          <a:p>
-            <a:pPr>
-              <a:spcAft>
-                <a:spcPts val="600"/>
-              </a:spcAft>
-            </a:pPr>
-            <a:r>
-              <a:rPr sz="1500">
-                <a:solidFill>
-                  <a:srgbClr val="22282E"/>
-                </a:solidFill>
-              </a:rPr>
-              <a:t>•  SBOM desactualizado respecto al artefacto — Se generó fuera del build. Genera SBOM y firma en el mismo job que produce el artefacto.</a:t>
+              <a:t>•  Genera el SBOM de un proyecto y de su imagen:</a:t>
+            </a:r>
+          </a:p>
+          <a:p>
+            <a:pPr>
+              <a:spcAft>
+                <a:spcPts val="600"/>
+              </a:spcAft>
+            </a:pPr>
+            <a:r>
+              <a:rPr sz="1500">
+                <a:solidFill>
+                  <a:srgbClr val="22282E"/>
+                </a:solidFill>
+              </a:rPr>
+              <a:t>•  Inspecciona: componentes, versiones, licencias, hashes.</a:t>
+            </a:r>
+          </a:p>
+          <a:p>
+            <a:pPr>
+              <a:spcAft>
+                <a:spcPts val="600"/>
+              </a:spcAft>
+            </a:pPr>
+            <a:r>
+              <a:rPr sz="1500">
+                <a:solidFill>
+                  <a:srgbClr val="22282E"/>
+                </a:solidFill>
+              </a:rPr>
+              <a:t>•  Consume el SBOM para responder a un CVE. Simula que sale un CVE en una librería: busca en el SBOM si está y en qué versión. Luego escanea con Grype/Trivy usando el SBOM como entrada.</a:t>
+            </a:r>
+          </a:p>
+          <a:p>
+            <a:pPr>
+              <a:spcAft>
+                <a:spcPts val="600"/>
+              </a:spcAft>
+            </a:pPr>
+            <a:r>
+              <a:rPr sz="1500">
+                <a:solidFill>
+                  <a:srgbClr val="22282E"/>
+                </a:solidFill>
+              </a:rPr>
+              <a:t>•  Adjunta el SBOM como atestación firmada a la imagen:</a:t>
+            </a:r>
+          </a:p>
+          <a:p>
+            <a:pPr>
+              <a:spcAft>
+                <a:spcPts val="600"/>
+              </a:spcAft>
+            </a:pPr>
+            <a:r>
+              <a:rPr sz="1500">
+                <a:solidFill>
+                  <a:srgbClr val="22282E"/>
+                </a:solidFill>
+              </a:rPr>
+              <a:t>•  Genera provenance SLSA en el pipeline. Configura el slsa-github-generator para que el workflow emita una atestación de procedencia del artefacto build.</a:t>
+            </a:r>
+          </a:p>
+          <a:p>
+            <a:pPr>
+              <a:spcAft>
+                <a:spcPts val="600"/>
+              </a:spcAft>
+            </a:pPr>
+            <a:r>
+              <a:rPr sz="1500">
+                <a:solidFill>
+                  <a:srgbClr val="22282E"/>
+                </a:solidFill>
+              </a:rPr>
+              <a:t>•  Verifica la procedencia. Comprueba que el artefacto fue construido por tu pipeline y a partir del commit esperado (cosign verify-attestation --type slsaprovenance).</a:t>
+            </a:r>
+          </a:p>
+          <a:p>
+            <a:pPr>
+              <a:spcAft>
+                <a:spcPts val="600"/>
+              </a:spcAft>
+            </a:pPr>
+            <a:r>
+              <a:rPr sz="1500">
+                <a:solidFill>
+                  <a:srgbClr val="22282E"/>
+                </a:solidFill>
+              </a:rPr>
+              <a:t>•  Autoevalúa tu nivel SLSA Build v1.2. Contrasta tu pipeline con L1–L3: procedencia, autenticidad emitida por plataforma alojada y protección/aislamiento del builder. Determina el nivel realmente…</a:t>
             </a:r>
           </a:p>
         </p:txBody>
@@ -3347,7 +3381,7 @@
                   <a:srgbClr val="0B3D2E"/>
                 </a:solidFill>
               </a:rPr>
-              <a:t>❓ Preguntas frecuentes</a:t>
+              <a:t>✍️ Ejercicios</a:t>
             </a:r>
           </a:p>
         </p:txBody>
@@ -3385,97 +3419,82 @@
                   <a:srgbClr val="22282E"/>
                 </a:solidFill>
               </a:rPr>
-              <a:t>•  ❓ ¿SBOM y SLSA compiten?</a:t>
-            </a:r>
-          </a:p>
-          <a:p>
-            <a:pPr>
-              <a:spcAft>
-                <a:spcPts val="600"/>
-              </a:spcAft>
-            </a:pPr>
-            <a:r>
-              <a:rPr sz="1500">
-                <a:solidFill>
-                  <a:srgbClr val="22282E"/>
-                </a:solidFill>
-              </a:rPr>
-              <a:t>•  No. El SBOM dice qué contiene el artefacto; SLSA garantiza cómo se construyó con integridad. Juntos dan visibilidad y confianza de la cadena.</a:t>
-            </a:r>
-          </a:p>
-          <a:p>
-            <a:pPr>
-              <a:spcAft>
-                <a:spcPts val="600"/>
-              </a:spcAft>
-            </a:pPr>
-            <a:r>
-              <a:rPr sz="1500">
-                <a:solidFill>
-                  <a:srgbClr val="22282E"/>
-                </a:solidFill>
-              </a:rPr>
-              <a:t>•  ❓ ¿CycloneDX o SPDX?</a:t>
-            </a:r>
-          </a:p>
-          <a:p>
-            <a:pPr>
-              <a:spcAft>
-                <a:spcPts val="600"/>
-              </a:spcAft>
-            </a:pPr>
-            <a:r>
-              <a:rPr sz="1500">
-                <a:solidFill>
-                  <a:srgbClr val="22282E"/>
-                </a:solidFill>
-              </a:rPr>
-              <a:t>•  CycloneDX está más orientado a seguridad (integra VEX, se usa mucho con herramientas de escaneo); SPDX es estándar ISO y fuerte en cumplimiento de licencias. Muchos generan ambos.</a:t>
-            </a:r>
-          </a:p>
-          <a:p>
-            <a:pPr>
-              <a:spcAft>
-                <a:spcPts val="600"/>
-              </a:spcAft>
-            </a:pPr>
-            <a:r>
-              <a:rPr sz="1500">
-                <a:solidFill>
-                  <a:srgbClr val="22282E"/>
-                </a:solidFill>
-              </a:rPr>
-              <a:t>•  ❓ ¿Qué nivel de SLSA necesito?</a:t>
-            </a:r>
-          </a:p>
-          <a:p>
-            <a:pPr>
-              <a:spcAft>
-                <a:spcPts val="600"/>
-              </a:spcAft>
-            </a:pPr>
-            <a:r>
-              <a:rPr sz="1500">
-                <a:solidFill>
-                  <a:srgbClr val="22282E"/>
-                </a:solidFill>
-              </a:rPr>
-              <a:t>•  Empieza por generar provenance (nivel bajo) y sube hacia builds aislados y no falsificables según tu criticidad. No todos necesitan el nivel máximo.</a:t>
-            </a:r>
-          </a:p>
-          <a:p>
-            <a:pPr>
-              <a:spcAft>
-                <a:spcPts val="600"/>
-              </a:spcAft>
-            </a:pPr>
-            <a:r>
-              <a:rPr sz="1500">
-                <a:solidFill>
-                  <a:srgbClr val="22282E"/>
-                </a:solidFill>
-              </a:rPr>
-              <a:t>•  ❓ ¿El SBOM me protege de un ataque de supply chain?</a:t>
+              <a:t>•  Genera SBOM del mismo artefacto en CycloneDX y SPDX y compara su estructura.</a:t>
+            </a:r>
+          </a:p>
+          <a:p>
+            <a:pPr>
+              <a:spcAft>
+                <a:spcPts val="600"/>
+              </a:spcAft>
+            </a:pPr>
+            <a:r>
+              <a:rPr sz="1500">
+                <a:solidFill>
+                  <a:srgbClr val="22282E"/>
+                </a:solidFill>
+              </a:rPr>
+              <a:t>•  Usa un SBOM para determinar en 1 minuto si estás afectado por un CVE dado.</a:t>
+            </a:r>
+          </a:p>
+          <a:p>
+            <a:pPr>
+              <a:spcAft>
+                <a:spcPts val="600"/>
+              </a:spcAft>
+            </a:pPr>
+            <a:r>
+              <a:rPr sz="1500">
+                <a:solidFill>
+                  <a:srgbClr val="22282E"/>
+                </a:solidFill>
+              </a:rPr>
+              <a:t>•  Firma y verifica un SBOM como atestación con cosign.</a:t>
+            </a:r>
+          </a:p>
+          <a:p>
+            <a:pPr>
+              <a:spcAft>
+                <a:spcPts val="600"/>
+              </a:spcAft>
+            </a:pPr>
+            <a:r>
+              <a:rPr sz="1500">
+                <a:solidFill>
+                  <a:srgbClr val="22282E"/>
+                </a:solidFill>
+              </a:rPr>
+              <a:t>•  Configura la generación de provenance SLSA en un pipeline.</a:t>
+            </a:r>
+          </a:p>
+          <a:p>
+            <a:pPr>
+              <a:spcAft>
+                <a:spcPts val="600"/>
+              </a:spcAft>
+            </a:pPr>
+            <a:r>
+              <a:rPr sz="1500">
+                <a:solidFill>
+                  <a:srgbClr val="22282E"/>
+                </a:solidFill>
+              </a:rPr>
+              <a:t>•  Verifica que un artefacto proviene del commit y pipeline esperados.</a:t>
+            </a:r>
+          </a:p>
+          <a:p>
+            <a:pPr>
+              <a:spcAft>
+                <a:spcPts val="600"/>
+              </a:spcAft>
+            </a:pPr>
+            <a:r>
+              <a:rPr sz="1500">
+                <a:solidFill>
+                  <a:srgbClr val="22282E"/>
+                </a:solidFill>
+              </a:rPr>
+              <a:t>•  Autoevalúa el nivel SLSA de tu pipeline y define un plan para subir uno.</a:t>
             </a:r>
           </a:p>
         </p:txBody>
@@ -3526,7 +3545,7 @@
                   <a:srgbClr val="0B3D2E"/>
                 </a:solidFill>
               </a:rPr>
-              <a:t>🔗 Referencias</a:t>
+              <a:t>📝 Reto verificable</a:t>
             </a:r>
           </a:p>
         </p:txBody>
@@ -3564,7 +3583,484 @@
                   <a:srgbClr val="22282E"/>
                 </a:solidFill>
               </a:rPr>
-              <a:t>•  SLSA — &lt;https://slsa.dev/&gt;</a:t>
+              <a:t>•  Entrega un artefacto con SBOM y procedencia verificables de extremo a extremo.</a:t>
+            </a:r>
+          </a:p>
+          <a:p>
+            <a:pPr>
+              <a:spcAft>
+                <a:spcPts val="600"/>
+              </a:spcAft>
+            </a:pPr>
+            <a:r>
+              <a:rPr sz="1500">
+                <a:solidFill>
+                  <a:srgbClr val="22282E"/>
+                </a:solidFill>
+              </a:rPr>
+              <a:t>•  Criterio de aceptación: (a) el pipeline genera un SBOM (CycloneDX o SPDX) del artefacto y</a:t>
+            </a:r>
+          </a:p>
+          <a:p>
+            <a:pPr>
+              <a:spcAft>
+                <a:spcPts val="600"/>
+              </a:spcAft>
+            </a:pPr>
+            <a:r>
+              <a:rPr sz="1500">
+                <a:solidFill>
+                  <a:srgbClr val="22282E"/>
+                </a:solidFill>
+              </a:rPr>
+              <a:t>•  lo publica; (b) el SBOM se adjunta como atestación firmada con cosign y la firma verifica; (c)</a:t>
+            </a:r>
+          </a:p>
+          <a:p>
+            <a:pPr>
+              <a:spcAft>
+                <a:spcPts val="600"/>
+              </a:spcAft>
+            </a:pPr>
+            <a:r>
+              <a:rPr sz="1500">
+                <a:solidFill>
+                  <a:srgbClr val="22282E"/>
+                </a:solidFill>
+              </a:rPr>
+              <a:t>•  se genera provenance SLSA verificable que ata el artefacto a su código fuente y build; y (d) se</a:t>
+            </a:r>
+          </a:p>
+          <a:p>
+            <a:pPr>
+              <a:spcAft>
+                <a:spcPts val="600"/>
+              </a:spcAft>
+            </a:pPr>
+            <a:r>
+              <a:rPr sz="1500">
+                <a:solidFill>
+                  <a:srgbClr val="22282E"/>
+                </a:solidFill>
+              </a:rPr>
+              <a:t>•  documenta el nivel SLSA alcanzado con evidencia.</a:t>
+            </a:r>
+          </a:p>
+        </p:txBody>
+      </p:sp>
+    </p:spTree>
+  </p:cSld>
+  <p:clrMapOvr>
+    <a:masterClrMapping/>
+  </p:clrMapOvr>
+</p:sld>
+</file>
+
+<file path=ppt/slides/slide13.xml><?xml version="1.0" encoding="utf-8"?>
+<p:sld xmlns:a="http://schemas.openxmlformats.org/drawingml/2006/main" xmlns:p="http://schemas.openxmlformats.org/presentationml/2006/main" xmlns:r="http://schemas.openxmlformats.org/officeDocument/2006/relationships">
+  <p:cSld>
+    <p:spTree>
+      <p:nvGrpSpPr>
+        <p:cNvPr id="1" name=""/>
+        <p:cNvGrpSpPr/>
+        <p:nvPr/>
+      </p:nvGrpSpPr>
+      <p:grpSpPr/>
+      <p:sp>
+        <p:nvSpPr>
+          <p:cNvPr id="2" name="TextBox 1"/>
+          <p:cNvSpPr txBox="1"/>
+          <p:nvPr/>
+        </p:nvSpPr>
+        <p:spPr>
+          <a:xfrm>
+            <a:off x="457200" y="320040"/>
+            <a:ext cx="8229600" cy="822960"/>
+          </a:xfrm>
+          <a:prstGeom prst="rect">
+            <a:avLst/>
+          </a:prstGeom>
+          <a:noFill/>
+        </p:spPr>
+        <p:txBody>
+          <a:bodyPr wrap="square">
+            <a:spAutoFit/>
+          </a:bodyPr>
+          <a:lstStyle/>
+          <a:p>
+            <a:r>
+              <a:rPr sz="2600" b="1">
+                <a:solidFill>
+                  <a:srgbClr val="0B3D2E"/>
+                </a:solidFill>
+              </a:rPr>
+              <a:t>⚠️ Errores comunes</a:t>
+            </a:r>
+          </a:p>
+        </p:txBody>
+      </p:sp>
+      <p:sp>
+        <p:nvSpPr>
+          <p:cNvPr id="3" name="TextBox 2"/>
+          <p:cNvSpPr txBox="1"/>
+          <p:nvPr/>
+        </p:nvSpPr>
+        <p:spPr>
+          <a:xfrm>
+            <a:off x="457200" y="1280160"/>
+            <a:ext cx="8229600" cy="4937760"/>
+          </a:xfrm>
+          <a:prstGeom prst="rect">
+            <a:avLst/>
+          </a:prstGeom>
+          <a:noFill/>
+        </p:spPr>
+        <p:txBody>
+          <a:bodyPr wrap="square">
+            <a:spAutoFit/>
+          </a:bodyPr>
+          <a:lstStyle/>
+          <a:p>
+            <a:pPr>
+              <a:spcAft>
+                <a:spcPts val="600"/>
+              </a:spcAft>
+            </a:pPr>
+            <a:r>
+              <a:rPr sz="1500">
+                <a:solidFill>
+                  <a:srgbClr val="22282E"/>
+                </a:solidFill>
+              </a:rPr>
+              <a:t>•  El SBOM no lista dependencias transitivas — Se generó de manifests, no del artefacto construido. Genera el SBOM de la imagen/binario final.</a:t>
+            </a:r>
+          </a:p>
+          <a:p>
+            <a:pPr>
+              <a:spcAft>
+                <a:spcPts val="600"/>
+              </a:spcAft>
+            </a:pPr>
+            <a:r>
+              <a:rPr sz="1500">
+                <a:solidFill>
+                  <a:srgbClr val="22282E"/>
+                </a:solidFill>
+              </a:rPr>
+              <a:t>•  "Tengo SBOM pero no me sirve" — No lo consumes. Intégralo con Grype/Trivy y en el proceso de respuesta a CVE.</a:t>
+            </a:r>
+          </a:p>
+          <a:p>
+            <a:pPr>
+              <a:spcAft>
+                <a:spcPts val="600"/>
+              </a:spcAft>
+            </a:pPr>
+            <a:r>
+              <a:rPr sz="1500">
+                <a:solidFill>
+                  <a:srgbClr val="22282E"/>
+                </a:solidFill>
+              </a:rPr>
+              <a:t>•  cosign verify-attestation falla — Tipo o identidad incorrectos. Ajusta --type y los filtros de certificado.</a:t>
+            </a:r>
+          </a:p>
+          <a:p>
+            <a:pPr>
+              <a:spcAft>
+                <a:spcPts val="600"/>
+              </a:spcAft>
+            </a:pPr>
+            <a:r>
+              <a:rPr sz="1500">
+                <a:solidFill>
+                  <a:srgbClr val="22282E"/>
+                </a:solidFill>
+              </a:rPr>
+              <a:t>•  Provenance dice que lo construyó una máquina desconocida — Build no aislado o token comprometido. Endurece el pipeline (clase 242) y usa runners efímeros.</a:t>
+            </a:r>
+          </a:p>
+          <a:p>
+            <a:pPr>
+              <a:spcAft>
+                <a:spcPts val="600"/>
+              </a:spcAft>
+            </a:pPr>
+            <a:r>
+              <a:rPr sz="1500">
+                <a:solidFill>
+                  <a:srgbClr val="22282E"/>
+                </a:solidFill>
+              </a:rPr>
+              <a:t>•  SBOM desactualizado respecto al artefacto — Se generó fuera del build. Genera SBOM y firma en el mismo job que produce el artefacto.</a:t>
+            </a:r>
+          </a:p>
+        </p:txBody>
+      </p:sp>
+    </p:spTree>
+  </p:cSld>
+  <p:clrMapOvr>
+    <a:masterClrMapping/>
+  </p:clrMapOvr>
+</p:sld>
+</file>
+
+<file path=ppt/slides/slide14.xml><?xml version="1.0" encoding="utf-8"?>
+<p:sld xmlns:a="http://schemas.openxmlformats.org/drawingml/2006/main" xmlns:p="http://schemas.openxmlformats.org/presentationml/2006/main" xmlns:r="http://schemas.openxmlformats.org/officeDocument/2006/relationships">
+  <p:cSld>
+    <p:spTree>
+      <p:nvGrpSpPr>
+        <p:cNvPr id="1" name=""/>
+        <p:cNvGrpSpPr/>
+        <p:nvPr/>
+      </p:nvGrpSpPr>
+      <p:grpSpPr/>
+      <p:sp>
+        <p:nvSpPr>
+          <p:cNvPr id="2" name="TextBox 1"/>
+          <p:cNvSpPr txBox="1"/>
+          <p:nvPr/>
+        </p:nvSpPr>
+        <p:spPr>
+          <a:xfrm>
+            <a:off x="457200" y="320040"/>
+            <a:ext cx="8229600" cy="822960"/>
+          </a:xfrm>
+          <a:prstGeom prst="rect">
+            <a:avLst/>
+          </a:prstGeom>
+          <a:noFill/>
+        </p:spPr>
+        <p:txBody>
+          <a:bodyPr wrap="square">
+            <a:spAutoFit/>
+          </a:bodyPr>
+          <a:lstStyle/>
+          <a:p>
+            <a:r>
+              <a:rPr sz="2600" b="1">
+                <a:solidFill>
+                  <a:srgbClr val="0B3D2E"/>
+                </a:solidFill>
+              </a:rPr>
+              <a:t>❓ Preguntas frecuentes</a:t>
+            </a:r>
+          </a:p>
+        </p:txBody>
+      </p:sp>
+      <p:sp>
+        <p:nvSpPr>
+          <p:cNvPr id="3" name="TextBox 2"/>
+          <p:cNvSpPr txBox="1"/>
+          <p:nvPr/>
+        </p:nvSpPr>
+        <p:spPr>
+          <a:xfrm>
+            <a:off x="457200" y="1280160"/>
+            <a:ext cx="8229600" cy="4937760"/>
+          </a:xfrm>
+          <a:prstGeom prst="rect">
+            <a:avLst/>
+          </a:prstGeom>
+          <a:noFill/>
+        </p:spPr>
+        <p:txBody>
+          <a:bodyPr wrap="square">
+            <a:spAutoFit/>
+          </a:bodyPr>
+          <a:lstStyle/>
+          <a:p>
+            <a:pPr>
+              <a:spcAft>
+                <a:spcPts val="600"/>
+              </a:spcAft>
+            </a:pPr>
+            <a:r>
+              <a:rPr sz="1500">
+                <a:solidFill>
+                  <a:srgbClr val="22282E"/>
+                </a:solidFill>
+              </a:rPr>
+              <a:t>•  ❓ ¿SBOM y SLSA compiten?</a:t>
+            </a:r>
+          </a:p>
+          <a:p>
+            <a:pPr>
+              <a:spcAft>
+                <a:spcPts val="600"/>
+              </a:spcAft>
+            </a:pPr>
+            <a:r>
+              <a:rPr sz="1500">
+                <a:solidFill>
+                  <a:srgbClr val="22282E"/>
+                </a:solidFill>
+              </a:rPr>
+              <a:t>•  No. El SBOM describe qué contiene el artefacto; SLSA establece requisitos sobre procedencia y garantías del proceso. Ninguno demuestra por sí solo que el software sea seguro.</a:t>
+            </a:r>
+          </a:p>
+          <a:p>
+            <a:pPr>
+              <a:spcAft>
+                <a:spcPts val="600"/>
+              </a:spcAft>
+            </a:pPr>
+            <a:r>
+              <a:rPr sz="1500">
+                <a:solidFill>
+                  <a:srgbClr val="22282E"/>
+                </a:solidFill>
+              </a:rPr>
+              <a:t>•  ❓ ¿CycloneDX o SPDX?</a:t>
+            </a:r>
+          </a:p>
+          <a:p>
+            <a:pPr>
+              <a:spcAft>
+                <a:spcPts val="600"/>
+              </a:spcAft>
+            </a:pPr>
+            <a:r>
+              <a:rPr sz="1500">
+                <a:solidFill>
+                  <a:srgbClr val="22282E"/>
+                </a:solidFill>
+              </a:rPr>
+              <a:t>•  CycloneDX está más orientado a seguridad (integra VEX, se usa mucho con herramientas de escaneo); SPDX es estándar ISO y fuerte en cumplimiento de licencias. Muchos generan ambos.</a:t>
+            </a:r>
+          </a:p>
+          <a:p>
+            <a:pPr>
+              <a:spcAft>
+                <a:spcPts val="600"/>
+              </a:spcAft>
+            </a:pPr>
+            <a:r>
+              <a:rPr sz="1500">
+                <a:solidFill>
+                  <a:srgbClr val="22282E"/>
+                </a:solidFill>
+              </a:rPr>
+              <a:t>•  ❓ ¿Qué nivel de SLSA necesito?</a:t>
+            </a:r>
+          </a:p>
+          <a:p>
+            <a:pPr>
+              <a:spcAft>
+                <a:spcPts val="600"/>
+              </a:spcAft>
+            </a:pPr>
+            <a:r>
+              <a:rPr sz="1500">
+                <a:solidFill>
+                  <a:srgbClr val="22282E"/>
+                </a:solidFill>
+              </a:rPr>
+              <a:t>•  Empieza por generar y verificar procedencia (Build L1) y adopta una plataforma alojada o endurecida cuando el riesgo justifique L2 o L3. El nivel debe declararse con la versión de la especificación y…</a:t>
+            </a:r>
+          </a:p>
+          <a:p>
+            <a:pPr>
+              <a:spcAft>
+                <a:spcPts val="600"/>
+              </a:spcAft>
+            </a:pPr>
+            <a:r>
+              <a:rPr sz="1500">
+                <a:solidFill>
+                  <a:srgbClr val="22282E"/>
+                </a:solidFill>
+              </a:rPr>
+              <a:t>•  ❓ ¿El SBOM me protege de un ataque de supply chain?</a:t>
+            </a:r>
+          </a:p>
+        </p:txBody>
+      </p:sp>
+    </p:spTree>
+  </p:cSld>
+  <p:clrMapOvr>
+    <a:masterClrMapping/>
+  </p:clrMapOvr>
+</p:sld>
+</file>
+
+<file path=ppt/slides/slide15.xml><?xml version="1.0" encoding="utf-8"?>
+<p:sld xmlns:a="http://schemas.openxmlformats.org/drawingml/2006/main" xmlns:p="http://schemas.openxmlformats.org/presentationml/2006/main" xmlns:r="http://schemas.openxmlformats.org/officeDocument/2006/relationships">
+  <p:cSld>
+    <p:spTree>
+      <p:nvGrpSpPr>
+        <p:cNvPr id="1" name=""/>
+        <p:cNvGrpSpPr/>
+        <p:nvPr/>
+      </p:nvGrpSpPr>
+      <p:grpSpPr/>
+      <p:sp>
+        <p:nvSpPr>
+          <p:cNvPr id="2" name="TextBox 1"/>
+          <p:cNvSpPr txBox="1"/>
+          <p:nvPr/>
+        </p:nvSpPr>
+        <p:spPr>
+          <a:xfrm>
+            <a:off x="457200" y="320040"/>
+            <a:ext cx="8229600" cy="822960"/>
+          </a:xfrm>
+          <a:prstGeom prst="rect">
+            <a:avLst/>
+          </a:prstGeom>
+          <a:noFill/>
+        </p:spPr>
+        <p:txBody>
+          <a:bodyPr wrap="square">
+            <a:spAutoFit/>
+          </a:bodyPr>
+          <a:lstStyle/>
+          <a:p>
+            <a:r>
+              <a:rPr sz="2600" b="1">
+                <a:solidFill>
+                  <a:srgbClr val="0B3D2E"/>
+                </a:solidFill>
+              </a:rPr>
+              <a:t>🔗 Referencias</a:t>
+            </a:r>
+          </a:p>
+        </p:txBody>
+      </p:sp>
+      <p:sp>
+        <p:nvSpPr>
+          <p:cNvPr id="3" name="TextBox 2"/>
+          <p:cNvSpPr txBox="1"/>
+          <p:nvPr/>
+        </p:nvSpPr>
+        <p:spPr>
+          <a:xfrm>
+            <a:off x="457200" y="1280160"/>
+            <a:ext cx="8229600" cy="4937760"/>
+          </a:xfrm>
+          <a:prstGeom prst="rect">
+            <a:avLst/>
+          </a:prstGeom>
+          <a:noFill/>
+        </p:spPr>
+        <p:txBody>
+          <a:bodyPr wrap="square">
+            <a:spAutoFit/>
+          </a:bodyPr>
+          <a:lstStyle/>
+          <a:p>
+            <a:pPr>
+              <a:spcAft>
+                <a:spcPts val="600"/>
+              </a:spcAft>
+            </a:pPr>
+            <a:r>
+              <a:rPr sz="1500">
+                <a:solidFill>
+                  <a:srgbClr val="22282E"/>
+                </a:solidFill>
+              </a:rPr>
+              <a:t>•  SLSA Specification v1.2 — &lt;https://slsa.dev/spec/v1.2/&gt;</a:t>
             </a:r>
           </a:p>
           <a:p>
@@ -3629,6 +4125,81 @@
           </a:p>
         </p:txBody>
       </p:sp>
+    </p:spTree>
+  </p:cSld>
+  <p:clrMapOvr>
+    <a:masterClrMapping/>
+  </p:clrMapOvr>
+</p:sld>
+</file>
+
+<file path=ppt/slides/slide16.xml><?xml version="1.0" encoding="utf-8"?>
+<p:sld xmlns:a="http://schemas.openxmlformats.org/drawingml/2006/main" xmlns:p="http://schemas.openxmlformats.org/presentationml/2006/main" xmlns:r="http://schemas.openxmlformats.org/officeDocument/2006/relationships">
+  <p:cSld>
+    <p:spTree>
+      <p:nvGrpSpPr>
+        <p:cNvPr id="1" name=""/>
+        <p:cNvGrpSpPr/>
+        <p:nvPr/>
+      </p:nvGrpSpPr>
+      <p:grpSpPr/>
+      <p:sp>
+        <p:nvSpPr>
+          <p:cNvPr id="2" name="TextBox 1"/>
+          <p:cNvSpPr txBox="1"/>
+          <p:nvPr/>
+        </p:nvSpPr>
+        <p:spPr>
+          <a:xfrm>
+            <a:off x="457200" y="274320"/>
+            <a:ext cx="8229600" cy="640080"/>
+          </a:xfrm>
+          <a:prstGeom prst="rect">
+            <a:avLst/>
+          </a:prstGeom>
+          <a:noFill/>
+        </p:spPr>
+        <p:txBody>
+          <a:bodyPr wrap="square">
+            <a:spAutoFit/>
+          </a:bodyPr>
+          <a:lstStyle/>
+          <a:p>
+            <a:r>
+              <a:rPr sz="2200" b="1">
+                <a:solidFill>
+                  <a:srgbClr val="0B3D2E"/>
+                </a:solidFill>
+              </a:rPr>
+              <a:t>Diagrama de la clase</a:t>
+            </a:r>
+          </a:p>
+        </p:txBody>
+      </p:sp>
+      <p:pic>
+        <p:nvPicPr>
+          <p:cNvPr id="3" name="Picture 2" descr="0b7bef170de8ea37.png"/>
+          <p:cNvPicPr>
+            <a:picLocks noChangeAspect="1"/>
+          </p:cNvPicPr>
+          <p:nvPr/>
+        </p:nvPicPr>
+        <p:blipFill>
+          <a:blip r:embed="rId2"/>
+          <a:stretch>
+            <a:fillRect/>
+          </a:stretch>
+        </p:blipFill>
+        <p:spPr>
+          <a:xfrm>
+            <a:off x="457200" y="2939796"/>
+            <a:ext cx="8229600" cy="1618488"/>
+          </a:xfrm>
+          <a:prstGeom prst="rect">
+            <a:avLst/>
+          </a:prstGeom>
+        </p:spPr>
+      </p:pic>
     </p:spTree>
   </p:cSld>
   <p:clrMapOvr>
@@ -3907,22 +4478,22 @@
                   <a:srgbClr val="22282E"/>
                 </a:solidFill>
               </a:rPr>
-              <a:t>•  Consumir un SBOM para responder "¿estoy afectado por este CVE?" en minutos.</a:t>
-            </a:r>
-          </a:p>
-          <a:p>
-            <a:pPr>
-              <a:spcAft>
-                <a:spcPts val="600"/>
-              </a:spcAft>
-            </a:pPr>
-            <a:r>
-              <a:rPr sz="1500">
-                <a:solidFill>
-                  <a:srgbClr val="22282E"/>
-                </a:solidFill>
-              </a:rPr>
-              <a:t>•  Describir los niveles de SLSA y qué garantiza cada uno.</a:t>
+              <a:t>•  Consumir un SBOM para acelerar la investigación de afectación, conservando la verificación de alcance.</a:t>
+            </a:r>
+          </a:p>
+          <a:p>
+            <a:pPr>
+              <a:spcAft>
+                <a:spcPts val="600"/>
+              </a:spcAft>
+            </a:pPr>
+            <a:r>
+              <a:rPr sz="1500">
+                <a:solidFill>
+                  <a:srgbClr val="22282E"/>
+                </a:solidFill>
+              </a:rPr>
+              <a:t>•  Describir los niveles del Build Track de SLSA v1.2 y qué garantiza cada uno.</a:t>
             </a:r>
           </a:p>
           <a:p>
@@ -4086,7 +4657,7 @@
                   <a:srgbClr val="22282E"/>
                 </a:solidFill>
               </a:rPr>
-              <a:t>•  5 — SLSA: niveles 1–4</a:t>
+              <a:t>•  5 — SLSA v1.2: Build L1–L3</a:t>
             </a:r>
           </a:p>
           <a:p>
@@ -4167,7 +4738,7 @@
                   <a:srgbClr val="0B3D2E"/>
                 </a:solidFill>
               </a:rPr>
-              <a:t>📖 Definiciones y características</a:t>
+              <a:t>🧠 Explicación en profundidad</a:t>
             </a:r>
           </a:p>
         </p:txBody>
@@ -4205,82 +4776,82 @@
                   <a:srgbClr val="22282E"/>
                 </a:solidFill>
               </a:rPr>
-              <a:t>•  SBOM (Software Bill of Materials): inventario formal de componentes de un artefacto. Característica: permite responder al instante qué contienes cuando sale un CVE (ej. Log4Shell).</a:t>
-            </a:r>
-          </a:p>
-          <a:p>
-            <a:pPr>
-              <a:spcAft>
-                <a:spcPts val="600"/>
-              </a:spcAft>
-            </a:pPr>
-            <a:r>
-              <a:rPr sz="1500">
-                <a:solidFill>
-                  <a:srgbClr val="22282E"/>
-                </a:solidFill>
-              </a:rPr>
-              <a:t>•  CycloneDX / SPDX: formatos estándar de SBOM. Característica: CycloneDX orientado a seguridad; SPDX orientado a licencias/ISO 5962.</a:t>
-            </a:r>
-          </a:p>
-          <a:p>
-            <a:pPr>
-              <a:spcAft>
-                <a:spcPts val="600"/>
-              </a:spcAft>
-            </a:pPr>
-            <a:r>
-              <a:rPr sz="1500">
-                <a:solidFill>
-                  <a:srgbClr val="22282E"/>
-                </a:solidFill>
-              </a:rPr>
-              <a:t>•  Procedencia (provenance): metadatos verificables de cómo, dónde y con qué se construyó un artefacto. Característica: base de SLSA; responde "¿este binario salió realmente de este código y pipeline?".</a:t>
-            </a:r>
-          </a:p>
-          <a:p>
-            <a:pPr>
-              <a:spcAft>
-                <a:spcPts val="600"/>
-              </a:spcAft>
-            </a:pPr>
-            <a:r>
-              <a:rPr sz="1500">
-                <a:solidFill>
-                  <a:srgbClr val="22282E"/>
-                </a:solidFill>
-              </a:rPr>
-              <a:t>•  SLSA: Supply-chain Levels for Software Artifacts, marco de niveles de integridad de build. Característica: niveles crecientes (build reproducible, aislado, no falsificable).</a:t>
-            </a:r>
-          </a:p>
-          <a:p>
-            <a:pPr>
-              <a:spcAft>
-                <a:spcPts val="600"/>
-              </a:spcAft>
-            </a:pPr>
-            <a:r>
-              <a:rPr sz="1500">
-                <a:solidFill>
-                  <a:srgbClr val="22282E"/>
-                </a:solidFill>
-              </a:rPr>
-              <a:t>•  Atestación: afirmación firmada sobre un artefacto (SBOM, provenance, resultados de escaneo). Característica: verificable criptográficamente y almacenable junto a la imagen.</a:t>
-            </a:r>
-          </a:p>
-          <a:p>
-            <a:pPr>
-              <a:spcAft>
-                <a:spcPts val="600"/>
-              </a:spcAft>
-            </a:pPr>
-            <a:r>
-              <a:rPr sz="1500">
-                <a:solidFill>
-                  <a:srgbClr val="22282E"/>
-                </a:solidFill>
-              </a:rPr>
-              <a:t>•  Orden Ejecutiva 14028: normativa de EE. UU. que exige SBOM a proveedores. Característica: convierte el SBOM en requisito, no en opcional.</a:t>
+              <a:t>•  La cadena de suministro abarca código fuente, dependencias, herramientas, builders, repositorios, registros y canales de actualización. Un atacante no necesita vulnerar la lógica del producto si…</a:t>
+            </a:r>
+          </a:p>
+          <a:p>
+            <a:pPr>
+              <a:spcAft>
+                <a:spcPts val="600"/>
+              </a:spcAft>
+            </a:pPr>
+            <a:r>
+              <a:rPr sz="1500">
+                <a:solidFill>
+                  <a:srgbClr val="22282E"/>
+                </a:solidFill>
+              </a:rPr>
+              <a:t>•  Una SBOM enumera componentes y relaciones bajo un formato como SPDX o CycloneDX. No garantiza que estén libres de vulnerabilidades, que el archivo sea completo ni que el build sea legítimo. Una firma…</a:t>
+            </a:r>
+          </a:p>
+          <a:p>
+            <a:pPr>
+              <a:spcAft>
+                <a:spcPts val="600"/>
+              </a:spcAft>
+            </a:pPr>
+            <a:r>
+              <a:rPr sz="1500">
+                <a:solidFill>
+                  <a:srgbClr val="22282E"/>
+                </a:solidFill>
+              </a:rPr>
+              <a:t>•  SLSA 1.2 organiza requisitos en tracks. En el Build Track, L1 exige procedencia; L2 añade procedencia autenticada generada por una plataforma alojada; L3 exige una plataforma endurecida con…</a:t>
+            </a:r>
+          </a:p>
+          <a:p>
+            <a:pPr>
+              <a:spcAft>
+                <a:spcPts val="600"/>
+              </a:spcAft>
+            </a:pPr>
+            <a:r>
+              <a:rPr sz="1500">
+                <a:solidFill>
+                  <a:srgbClr val="22282E"/>
+                </a:solidFill>
+              </a:rPr>
+              <a:t>•  Adoptar SLSA significa seleccionar una amenaza y una garantía, no colocar una insignia. Si el productor genera su propia procedencia desde un paso que puede modificarla, el documento describe pero…</a:t>
+            </a:r>
+          </a:p>
+          <a:p>
+            <a:pPr>
+              <a:spcAft>
+                <a:spcPts val="600"/>
+              </a:spcAft>
+            </a:pPr>
+            <a:r>
+              <a:rPr sz="1500">
+                <a:solidFill>
+                  <a:srgbClr val="22282E"/>
+                </a:solidFill>
+              </a:rPr>
+              <a:t>•  La SBOM debe generarse desde el artefacto final cuando sea posible, conservar versiones y relaciones, y publicarse con una política de acceso apropiada. Se valida sintaxis, completitud razonable y…</a:t>
+            </a:r>
+          </a:p>
+          <a:p>
+            <a:pPr>
+              <a:spcAft>
+                <a:spcPts val="600"/>
+              </a:spcAft>
+            </a:pPr>
+            <a:r>
+              <a:rPr sz="1500">
+                <a:solidFill>
+                  <a:srgbClr val="22282E"/>
+                </a:solidFill>
+              </a:rPr>
+              <a:t>•  El pipeline construye dos veces: una para escanear y otra para publicar. La primera genera una SBOM limpia; la segunda descarga una dependencia más reciente por no usar lockfile. El registro almacena…</a:t>
             </a:r>
           </a:p>
         </p:txBody>
@@ -4331,7 +4902,7 @@
                   <a:srgbClr val="0B3D2E"/>
                 </a:solidFill>
               </a:rPr>
-              <a:t>🧰 Herramientas y preparación</a:t>
+              <a:t>📔 Glosario operativo</a:t>
             </a:r>
           </a:p>
         </p:txBody>
@@ -4369,82 +4940,82 @@
                   <a:srgbClr val="22282E"/>
                 </a:solidFill>
               </a:rPr>
-              <a:t>•  Syft (Anchore) — genera SBOM de código e imágenes.</a:t>
-            </a:r>
-          </a:p>
-          <a:p>
-            <a:pPr>
-              <a:spcAft>
-                <a:spcPts val="600"/>
-              </a:spcAft>
-            </a:pPr>
-            <a:r>
-              <a:rPr sz="1500">
-                <a:solidFill>
-                  <a:srgbClr val="22282E"/>
-                </a:solidFill>
-              </a:rPr>
-              <a:t>•  Grype / Trivy — consumen SBOM para detectar CVE.</a:t>
-            </a:r>
-          </a:p>
-          <a:p>
-            <a:pPr>
-              <a:spcAft>
-                <a:spcPts val="600"/>
-              </a:spcAft>
-            </a:pPr>
-            <a:r>
-              <a:rPr sz="1500">
-                <a:solidFill>
-                  <a:srgbClr val="22282E"/>
-                </a:solidFill>
-              </a:rPr>
-              <a:t>•  cosign — firma imágenes y adjunta atestaciones (SBOM, provenance).</a:t>
-            </a:r>
-          </a:p>
-          <a:p>
-            <a:pPr>
-              <a:spcAft>
-                <a:spcPts val="600"/>
-              </a:spcAft>
-            </a:pPr>
-            <a:r>
-              <a:rPr sz="1500">
-                <a:solidFill>
-                  <a:srgbClr val="22282E"/>
-                </a:solidFill>
-              </a:rPr>
-              <a:t>•  SLSA GitHub Generator — genera provenance SLSA en Actions.</a:t>
-            </a:r>
-          </a:p>
-          <a:p>
-            <a:pPr>
-              <a:spcAft>
-                <a:spcPts val="600"/>
-              </a:spcAft>
-            </a:pPr>
-            <a:r>
-              <a:rPr sz="1500">
-                <a:solidFill>
-                  <a:srgbClr val="22282E"/>
-                </a:solidFill>
-              </a:rPr>
-              <a:t>•  syft miapp:1.0 -o cyclonedx-json &gt; sbom.cdx.json</a:t>
-            </a:r>
-          </a:p>
-          <a:p>
-            <a:pPr>
-              <a:spcAft>
-                <a:spcPts val="600"/>
-              </a:spcAft>
-            </a:pPr>
-            <a:r>
-              <a:rPr sz="1500">
-                <a:solidFill>
-                  <a:srgbClr val="22282E"/>
-                </a:solidFill>
-              </a:rPr>
-              <a:t>•  grype sbom:sbom.cdx.json</a:t>
+              <a:t>•  Término — Definición útil</a:t>
+            </a:r>
+          </a:p>
+          <a:p>
+            <a:pPr>
+              <a:spcAft>
+                <a:spcPts val="600"/>
+              </a:spcAft>
+            </a:pPr>
+            <a:r>
+              <a:rPr sz="1500">
+                <a:solidFill>
+                  <a:srgbClr val="22282E"/>
+                </a:solidFill>
+              </a:rPr>
+              <a:t>•  SBOM — Inventario estructurado de componentes y relaciones de un artefacto.</a:t>
+            </a:r>
+          </a:p>
+          <a:p>
+            <a:pPr>
+              <a:spcAft>
+                <a:spcPts val="600"/>
+              </a:spcAft>
+            </a:pPr>
+            <a:r>
+              <a:rPr sz="1500">
+                <a:solidFill>
+                  <a:srgbClr val="22282E"/>
+                </a:solidFill>
+              </a:rPr>
+              <a:t>•  Attestation — Declaración firmable sobre una propiedad o proceso.</a:t>
+            </a:r>
+          </a:p>
+          <a:p>
+            <a:pPr>
+              <a:spcAft>
+                <a:spcPts val="600"/>
+              </a:spcAft>
+            </a:pPr>
+            <a:r>
+              <a:rPr sz="1500">
+                <a:solidFill>
+                  <a:srgbClr val="22282E"/>
+                </a:solidFill>
+              </a:rPr>
+              <a:t>•  Provenance — Evidencia de materiales, builder y pasos que produjeron un artefacto.</a:t>
+            </a:r>
+          </a:p>
+          <a:p>
+            <a:pPr>
+              <a:spcAft>
+                <a:spcPts val="600"/>
+              </a:spcAft>
+            </a:pPr>
+            <a:r>
+              <a:rPr sz="1500">
+                <a:solidFill>
+                  <a:srgbClr val="22282E"/>
+                </a:solidFill>
+              </a:rPr>
+              <a:t>•  SLSA track — Conjunto de garantías y niveles para un aspecto de la cadena.</a:t>
+            </a:r>
+          </a:p>
+          <a:p>
+            <a:pPr>
+              <a:spcAft>
+                <a:spcPts val="600"/>
+              </a:spcAft>
+            </a:pPr>
+            <a:r>
+              <a:rPr sz="1500">
+                <a:solidFill>
+                  <a:srgbClr val="22282E"/>
+                </a:solidFill>
+              </a:rPr>
+              <a:t>•  VEX — Estado razonado de afectación frente a una vulnerabilidad.</a:t>
             </a:r>
           </a:p>
         </p:txBody>
@@ -4495,7 +5066,7 @@
                   <a:srgbClr val="0B3D2E"/>
                 </a:solidFill>
               </a:rPr>
-              <a:t>🧪 Laboratorio guiado</a:t>
+              <a:t>✅ Criterio de dominio</a:t>
             </a:r>
           </a:p>
         </p:txBody>
@@ -4533,97 +5104,7 @@
                   <a:srgbClr val="22282E"/>
                 </a:solidFill>
               </a:rPr>
-              <a:t>•  Genera el SBOM de un proyecto y de su imagen:</a:t>
-            </a:r>
-          </a:p>
-          <a:p>
-            <a:pPr>
-              <a:spcAft>
-                <a:spcPts val="600"/>
-              </a:spcAft>
-            </a:pPr>
-            <a:r>
-              <a:rPr sz="1500">
-                <a:solidFill>
-                  <a:srgbClr val="22282E"/>
-                </a:solidFill>
-              </a:rPr>
-              <a:t>•  syft dir:./mi-proyecto -o spdx-json &gt; sbom.spdx.json</a:t>
-            </a:r>
-          </a:p>
-          <a:p>
-            <a:pPr>
-              <a:spcAft>
-                <a:spcPts val="600"/>
-              </a:spcAft>
-            </a:pPr>
-            <a:r>
-              <a:rPr sz="1500">
-                <a:solidFill>
-                  <a:srgbClr val="22282E"/>
-                </a:solidFill>
-              </a:rPr>
-              <a:t>•  syft miapp:1.0 -o cyclonedx-json &gt; sbom.cdx.json</a:t>
-            </a:r>
-          </a:p>
-          <a:p>
-            <a:pPr>
-              <a:spcAft>
-                <a:spcPts val="600"/>
-              </a:spcAft>
-            </a:pPr>
-            <a:r>
-              <a:rPr sz="1500">
-                <a:solidFill>
-                  <a:srgbClr val="22282E"/>
-                </a:solidFill>
-              </a:rPr>
-              <a:t>•  Inspecciona: componentes, versiones, licencias, hashes.</a:t>
-            </a:r>
-          </a:p>
-          <a:p>
-            <a:pPr>
-              <a:spcAft>
-                <a:spcPts val="600"/>
-              </a:spcAft>
-            </a:pPr>
-            <a:r>
-              <a:rPr sz="1500">
-                <a:solidFill>
-                  <a:srgbClr val="22282E"/>
-                </a:solidFill>
-              </a:rPr>
-              <a:t>•  Consume el SBOM para responder a un CVE. Simula que sale un CVE en una librería: busca en el SBOM si está y en qué versión. Luego escanea con Grype/Trivy usando el SBOM como entrada.</a:t>
-            </a:r>
-          </a:p>
-          <a:p>
-            <a:pPr>
-              <a:spcAft>
-                <a:spcPts val="600"/>
-              </a:spcAft>
-            </a:pPr>
-            <a:r>
-              <a:rPr sz="1500">
-                <a:solidFill>
-                  <a:srgbClr val="22282E"/>
-                </a:solidFill>
-              </a:rPr>
-              <a:t>•  Adjunta el SBOM como atestación firmada a la imagen:</a:t>
-            </a:r>
-          </a:p>
-          <a:p>
-            <a:pPr>
-              <a:spcAft>
-                <a:spcPts val="600"/>
-              </a:spcAft>
-            </a:pPr>
-            <a:r>
-              <a:rPr sz="1500">
-                <a:solidFill>
-                  <a:srgbClr val="22282E"/>
-                </a:solidFill>
-              </a:rPr>
-              <a:t>•  cosign attest --predicate sbom.cdx.json --type cyclonedx \</a:t>
+              <a:t>•  Existe dominio cuando el alumno puede vincular artefacto, SBOM, firma y procedencia por digest, explicar qué garantiza cada evidencia, describir correctamente SLSA Build v1.2 y diseñar verificación…</a:t>
             </a:r>
           </a:p>
         </p:txBody>
@@ -4674,7 +5155,7 @@
                   <a:srgbClr val="0B3D2E"/>
                 </a:solidFill>
               </a:rPr>
-              <a:t>✍️ Ejercicios</a:t>
+              <a:t>📖 Definiciones y características</a:t>
             </a:r>
           </a:p>
         </p:txBody>
@@ -4712,82 +5193,82 @@
                   <a:srgbClr val="22282E"/>
                 </a:solidFill>
               </a:rPr>
-              <a:t>•  Genera SBOM del mismo artefacto en CycloneDX y SPDX y compara su estructura.</a:t>
-            </a:r>
-          </a:p>
-          <a:p>
-            <a:pPr>
-              <a:spcAft>
-                <a:spcPts val="600"/>
-              </a:spcAft>
-            </a:pPr>
-            <a:r>
-              <a:rPr sz="1500">
-                <a:solidFill>
-                  <a:srgbClr val="22282E"/>
-                </a:solidFill>
-              </a:rPr>
-              <a:t>•  Usa un SBOM para determinar en 1 minuto si estás afectado por un CVE dado.</a:t>
-            </a:r>
-          </a:p>
-          <a:p>
-            <a:pPr>
-              <a:spcAft>
-                <a:spcPts val="600"/>
-              </a:spcAft>
-            </a:pPr>
-            <a:r>
-              <a:rPr sz="1500">
-                <a:solidFill>
-                  <a:srgbClr val="22282E"/>
-                </a:solidFill>
-              </a:rPr>
-              <a:t>•  Firma y verifica un SBOM como atestación con cosign.</a:t>
-            </a:r>
-          </a:p>
-          <a:p>
-            <a:pPr>
-              <a:spcAft>
-                <a:spcPts val="600"/>
-              </a:spcAft>
-            </a:pPr>
-            <a:r>
-              <a:rPr sz="1500">
-                <a:solidFill>
-                  <a:srgbClr val="22282E"/>
-                </a:solidFill>
-              </a:rPr>
-              <a:t>•  Configura la generación de provenance SLSA en un pipeline.</a:t>
-            </a:r>
-          </a:p>
-          <a:p>
-            <a:pPr>
-              <a:spcAft>
-                <a:spcPts val="600"/>
-              </a:spcAft>
-            </a:pPr>
-            <a:r>
-              <a:rPr sz="1500">
-                <a:solidFill>
-                  <a:srgbClr val="22282E"/>
-                </a:solidFill>
-              </a:rPr>
-              <a:t>•  Verifica que un artefacto proviene del commit y pipeline esperados.</a:t>
-            </a:r>
-          </a:p>
-          <a:p>
-            <a:pPr>
-              <a:spcAft>
-                <a:spcPts val="600"/>
-              </a:spcAft>
-            </a:pPr>
-            <a:r>
-              <a:rPr sz="1500">
-                <a:solidFill>
-                  <a:srgbClr val="22282E"/>
-                </a:solidFill>
-              </a:rPr>
-              <a:t>•  Autoevalúa el nivel SLSA de tu pipeline y define un plan para subir uno.</a:t>
+              <a:t>•  SBOM (Software Bill of Materials): inventario formal de componentes de un artefacto. Característica: acelera la investigación cuando aparece una vulnerabilidad, pero requiere validar completitud y…</a:t>
+            </a:r>
+          </a:p>
+          <a:p>
+            <a:pPr>
+              <a:spcAft>
+                <a:spcPts val="600"/>
+              </a:spcAft>
+            </a:pPr>
+            <a:r>
+              <a:rPr sz="1500">
+                <a:solidFill>
+                  <a:srgbClr val="22282E"/>
+                </a:solidFill>
+              </a:rPr>
+              <a:t>•  CycloneDX / SPDX: formatos estándar de SBOM. Característica: CycloneDX nació orientado al análisis de componentes; SPDX es ISO/IEC 5962:2021 y cubre también licencias y procedencia.</a:t>
+            </a:r>
+          </a:p>
+          <a:p>
+            <a:pPr>
+              <a:spcAft>
+                <a:spcPts val="600"/>
+              </a:spcAft>
+            </a:pPr>
+            <a:r>
+              <a:rPr sz="1500">
+                <a:solidFill>
+                  <a:srgbClr val="22282E"/>
+                </a:solidFill>
+              </a:rPr>
+              <a:t>•  Procedencia (provenance): metadatos verificables de cómo, dónde y con qué se construyó un artefacto. Característica: base de SLSA; responde "¿este binario salió realmente de este código y pipeline?".</a:t>
+            </a:r>
+          </a:p>
+          <a:p>
+            <a:pPr>
+              <a:spcAft>
+                <a:spcPts val="600"/>
+              </a:spcAft>
+            </a:pPr>
+            <a:r>
+              <a:rPr sz="1500">
+                <a:solidFill>
+                  <a:srgbClr val="22282E"/>
+                </a:solidFill>
+              </a:rPr>
+              <a:t>•  SLSA: Supply-chain Levels for Software Artifacts, especificación organizada en tracks. Característica: el Build Track v1.2 eleva garantías desde procedencia existente hasta builds endurecidos.</a:t>
+            </a:r>
+          </a:p>
+          <a:p>
+            <a:pPr>
+              <a:spcAft>
+                <a:spcPts val="600"/>
+              </a:spcAft>
+            </a:pPr>
+            <a:r>
+              <a:rPr sz="1500">
+                <a:solidFill>
+                  <a:srgbClr val="22282E"/>
+                </a:solidFill>
+              </a:rPr>
+              <a:t>•  Atestación: afirmación firmada sobre un artefacto (SBOM, provenance, resultados de escaneo). Característica: verificable criptográficamente y almacenable junto a la imagen.</a:t>
+            </a:r>
+          </a:p>
+          <a:p>
+            <a:pPr>
+              <a:spcAft>
+                <a:spcPts val="600"/>
+              </a:spcAft>
+            </a:pPr>
+            <a:r>
+              <a:rPr sz="1500">
+                <a:solidFill>
+                  <a:srgbClr val="22282E"/>
+                </a:solidFill>
+              </a:rPr>
+              <a:t>•  Orden Ejecutiva 14028: orden federal estadounidense que instruyó requisitos y guías de seguridad para software adquirido por agencias; impulsó, entre otras medidas, el uso de SBOM. Su aplicación…</a:t>
             </a:r>
           </a:p>
         </p:txBody>
@@ -4838,7 +5319,7 @@
                   <a:srgbClr val="0B3D2E"/>
                 </a:solidFill>
               </a:rPr>
-              <a:t>📝 Reto verificable</a:t>
+              <a:t>🧰 Herramientas y preparación</a:t>
             </a:r>
           </a:p>
         </p:txBody>
@@ -4876,67 +5357,52 @@
                   <a:srgbClr val="22282E"/>
                 </a:solidFill>
               </a:rPr>
-              <a:t>•  Entrega un artefacto con SBOM y procedencia verificables de extremo a extremo.</a:t>
-            </a:r>
-          </a:p>
-          <a:p>
-            <a:pPr>
-              <a:spcAft>
-                <a:spcPts val="600"/>
-              </a:spcAft>
-            </a:pPr>
-            <a:r>
-              <a:rPr sz="1500">
-                <a:solidFill>
-                  <a:srgbClr val="22282E"/>
-                </a:solidFill>
-              </a:rPr>
-              <a:t>•  Criterio de aceptación: (a) el pipeline genera un SBOM (CycloneDX o SPDX) del artefacto y</a:t>
-            </a:r>
-          </a:p>
-          <a:p>
-            <a:pPr>
-              <a:spcAft>
-                <a:spcPts val="600"/>
-              </a:spcAft>
-            </a:pPr>
-            <a:r>
-              <a:rPr sz="1500">
-                <a:solidFill>
-                  <a:srgbClr val="22282E"/>
-                </a:solidFill>
-              </a:rPr>
-              <a:t>•  lo publica; (b) el SBOM se adjunta como atestación firmada con cosign y la firma verifica; (c)</a:t>
-            </a:r>
-          </a:p>
-          <a:p>
-            <a:pPr>
-              <a:spcAft>
-                <a:spcPts val="600"/>
-              </a:spcAft>
-            </a:pPr>
-            <a:r>
-              <a:rPr sz="1500">
-                <a:solidFill>
-                  <a:srgbClr val="22282E"/>
-                </a:solidFill>
-              </a:rPr>
-              <a:t>•  se genera provenance SLSA verificable que ata el artefacto a su código fuente y build; y (d) se</a:t>
-            </a:r>
-          </a:p>
-          <a:p>
-            <a:pPr>
-              <a:spcAft>
-                <a:spcPts val="600"/>
-              </a:spcAft>
-            </a:pPr>
-            <a:r>
-              <a:rPr sz="1500">
-                <a:solidFill>
-                  <a:srgbClr val="22282E"/>
-                </a:solidFill>
-              </a:rPr>
-              <a:t>•  documenta el nivel SLSA alcanzado con evidencia.</a:t>
+              <a:t>•  Syft (Anchore) — genera SBOM de código e imágenes.</a:t>
+            </a:r>
+          </a:p>
+          <a:p>
+            <a:pPr>
+              <a:spcAft>
+                <a:spcPts val="600"/>
+              </a:spcAft>
+            </a:pPr>
+            <a:r>
+              <a:rPr sz="1500">
+                <a:solidFill>
+                  <a:srgbClr val="22282E"/>
+                </a:solidFill>
+              </a:rPr>
+              <a:t>•  Grype / Trivy — consumen SBOM para detectar CVE.</a:t>
+            </a:r>
+          </a:p>
+          <a:p>
+            <a:pPr>
+              <a:spcAft>
+                <a:spcPts val="600"/>
+              </a:spcAft>
+            </a:pPr>
+            <a:r>
+              <a:rPr sz="1500">
+                <a:solidFill>
+                  <a:srgbClr val="22282E"/>
+                </a:solidFill>
+              </a:rPr>
+              <a:t>•  cosign — firma imágenes y adjunta atestaciones (SBOM, provenance).</a:t>
+            </a:r>
+          </a:p>
+          <a:p>
+            <a:pPr>
+              <a:spcAft>
+                <a:spcPts val="600"/>
+              </a:spcAft>
+            </a:pPr>
+            <a:r>
+              <a:rPr sz="1500">
+                <a:solidFill>
+                  <a:srgbClr val="22282E"/>
+                </a:solidFill>
+              </a:rPr>
+              <a:t>•  SLSA GitHub Generator — genera provenance SLSA en Actions.</a:t>
             </a:r>
           </a:p>
         </p:txBody>
